--- a/docs/PITCH_DEMO.pptx
+++ b/docs/PITCH_DEMO.pptx
@@ -107,7 +107,103 @@
       </a:defRPr>
     </a:lvl9pPr>
   </p:defaultTextStyle>
+  <p:extLst>
+    <p:ext uri="{EFAFB233-063F-42B5-8137-9DF3F51BA10A}">
+      <p15:sldGuideLst xmlns:p15="http://schemas.microsoft.com/office/powerpoint/2012/main"/>
+    </p:ext>
+  </p:extLst>
 </p:presentation>
+</file>
+
+<file path=ppt/revisionInfo.xml><?xml version="1.0" encoding="utf-8"?>
+<p1510:revInfo xmlns:a="http://schemas.openxmlformats.org/drawingml/2006/main" xmlns:r="http://schemas.openxmlformats.org/officeDocument/2006/relationships" xmlns:p1510="http://schemas.microsoft.com/office/powerpoint/2015/10/main">
+  <p1510:revLst>
+    <p1510:client id="{5D9663E4-0260-4AE8-B17B-C73E0679857F}" v="4" dt="2026-05-15T14:02:24.163"/>
+  </p1510:revLst>
+</p1510:revInfo>
+</file>
+
+<file path=ppt/changesInfos/changesInfo1.xml><?xml version="1.0" encoding="utf-8"?>
+<pc:chgInfo xmlns:a="http://schemas.openxmlformats.org/drawingml/2006/main" xmlns:r="http://schemas.openxmlformats.org/officeDocument/2006/relationships" xmlns:ac="http://schemas.microsoft.com/office/drawing/2013/main/command" xmlns:pc="http://schemas.microsoft.com/office/powerpoint/2013/main/command">
+  <pc:docChgLst>
+    <pc:chgData name="Barbosa Diniz, Sofia" userId="7df14296-6125-49ec-a4f5-4260895b8cd0" providerId="ADAL" clId="{AB103130-9596-4E2D-B338-D09A3A47D381}"/>
+    <pc:docChg chg="undo redo custSel modSld">
+      <pc:chgData name="Barbosa Diniz, Sofia" userId="7df14296-6125-49ec-a4f5-4260895b8cd0" providerId="ADAL" clId="{AB103130-9596-4E2D-B338-D09A3A47D381}" dt="2026-05-15T14:02:48.463" v="355"/>
+      <pc:docMkLst>
+        <pc:docMk/>
+      </pc:docMkLst>
+      <pc:sldChg chg="modSp mod">
+        <pc:chgData name="Barbosa Diniz, Sofia" userId="7df14296-6125-49ec-a4f5-4260895b8cd0" providerId="ADAL" clId="{AB103130-9596-4E2D-B338-D09A3A47D381}" dt="2026-05-15T13:55:42.352" v="37" actId="20577"/>
+        <pc:sldMkLst>
+          <pc:docMk/>
+          <pc:sldMk cId="0" sldId="257"/>
+        </pc:sldMkLst>
+        <pc:spChg chg="mod">
+          <ac:chgData name="Barbosa Diniz, Sofia" userId="7df14296-6125-49ec-a4f5-4260895b8cd0" providerId="ADAL" clId="{AB103130-9596-4E2D-B338-D09A3A47D381}" dt="2026-05-15T13:55:42.352" v="37" actId="20577"/>
+          <ac:spMkLst>
+            <pc:docMk/>
+            <pc:sldMk cId="0" sldId="257"/>
+            <ac:spMk id="19" creationId="{00000000-0000-0000-0000-000000000000}"/>
+          </ac:spMkLst>
+        </pc:spChg>
+      </pc:sldChg>
+      <pc:sldChg chg="modSp mod">
+        <pc:chgData name="Barbosa Diniz, Sofia" userId="7df14296-6125-49ec-a4f5-4260895b8cd0" providerId="ADAL" clId="{AB103130-9596-4E2D-B338-D09A3A47D381}" dt="2026-05-15T13:55:39.848" v="35" actId="20577"/>
+        <pc:sldMkLst>
+          <pc:docMk/>
+          <pc:sldMk cId="0" sldId="258"/>
+        </pc:sldMkLst>
+        <pc:spChg chg="mod">
+          <ac:chgData name="Barbosa Diniz, Sofia" userId="7df14296-6125-49ec-a4f5-4260895b8cd0" providerId="ADAL" clId="{AB103130-9596-4E2D-B338-D09A3A47D381}" dt="2026-05-15T13:55:39.848" v="35" actId="20577"/>
+          <ac:spMkLst>
+            <pc:docMk/>
+            <pc:sldMk cId="0" sldId="258"/>
+            <ac:spMk id="20" creationId="{00000000-0000-0000-0000-000000000000}"/>
+          </ac:spMkLst>
+        </pc:spChg>
+        <pc:spChg chg="mod">
+          <ac:chgData name="Barbosa Diniz, Sofia" userId="7df14296-6125-49ec-a4f5-4260895b8cd0" providerId="ADAL" clId="{AB103130-9596-4E2D-B338-D09A3A47D381}" dt="2026-05-15T13:55:39.404" v="34" actId="20577"/>
+          <ac:spMkLst>
+            <pc:docMk/>
+            <pc:sldMk cId="0" sldId="258"/>
+            <ac:spMk id="21" creationId="{00000000-0000-0000-0000-000000000000}"/>
+          </ac:spMkLst>
+        </pc:spChg>
+      </pc:sldChg>
+      <pc:sldChg chg="addSp delSp modSp mod">
+        <pc:chgData name="Barbosa Diniz, Sofia" userId="7df14296-6125-49ec-a4f5-4260895b8cd0" providerId="ADAL" clId="{AB103130-9596-4E2D-B338-D09A3A47D381}" dt="2026-05-15T14:02:48.463" v="355"/>
+        <pc:sldMkLst>
+          <pc:docMk/>
+          <pc:sldMk cId="0" sldId="259"/>
+        </pc:sldMkLst>
+        <pc:spChg chg="add mod">
+          <ac:chgData name="Barbosa Diniz, Sofia" userId="7df14296-6125-49ec-a4f5-4260895b8cd0" providerId="ADAL" clId="{AB103130-9596-4E2D-B338-D09A3A47D381}" dt="2026-05-15T14:02:48.463" v="355"/>
+          <ac:spMkLst>
+            <pc:docMk/>
+            <pc:sldMk cId="0" sldId="259"/>
+            <ac:spMk id="7" creationId="{1F5D939C-E044-8F06-2DF8-F3B39EF1DF1C}"/>
+          </ac:spMkLst>
+        </pc:spChg>
+        <pc:graphicFrameChg chg="add del mod">
+          <ac:chgData name="Barbosa Diniz, Sofia" userId="7df14296-6125-49ec-a4f5-4260895b8cd0" providerId="ADAL" clId="{AB103130-9596-4E2D-B338-D09A3A47D381}" dt="2026-05-15T14:02:20.482" v="352" actId="21"/>
+          <ac:graphicFrameMkLst>
+            <pc:docMk/>
+            <pc:sldMk cId="0" sldId="259"/>
+            <ac:graphicFrameMk id="8" creationId="{21703BA7-73FE-FA02-DCD4-8CFBC244ABF4}"/>
+          </ac:graphicFrameMkLst>
+        </pc:graphicFrameChg>
+        <pc:graphicFrameChg chg="add mod">
+          <ac:chgData name="Barbosa Diniz, Sofia" userId="7df14296-6125-49ec-a4f5-4260895b8cd0" providerId="ADAL" clId="{AB103130-9596-4E2D-B338-D09A3A47D381}" dt="2026-05-15T14:02:23.355" v="353"/>
+          <ac:graphicFrameMkLst>
+            <pc:docMk/>
+            <pc:sldMk cId="0" sldId="259"/>
+            <ac:graphicFrameMk id="9" creationId="{21703BA7-73FE-FA02-DCD4-8CFBC244ABF4}"/>
+          </ac:graphicFrameMkLst>
+        </pc:graphicFrameChg>
+      </pc:sldChg>
+    </pc:docChg>
+  </pc:docChgLst>
+</pc:chgInfo>
 </file>
 
 <file path=ppt/notesMasters/notesMaster1.xml><?xml version="1.0" encoding="utf-8"?>
@@ -1502,7 +1598,7 @@
               <a:buNone/>
             </a:pPr>
             <a:r>
-              <a:rPr lang="en-US" sz="1200">
+              <a:rPr lang="en-US" sz="1200" dirty="0">
                 <a:solidFill>
                   <a:srgbClr val="64748B"/>
                 </a:solidFill>
@@ -1519,7 +1615,7 @@
               <a:buNone/>
             </a:pPr>
             <a:r>
-              <a:rPr lang="en-US" sz="1200">
+              <a:rPr lang="en-US" sz="1200" dirty="0">
                 <a:solidFill>
                   <a:srgbClr val="64748B"/>
                 </a:solidFill>
@@ -1759,7 +1855,7 @@
                 <a:ea typeface="Calibri" pitchFamily="34" charset="-122"/>
                 <a:cs typeface="Calibri" pitchFamily="34" charset="-120"/>
               </a:rPr>
-              <a:t>Agents parse CVs,</a:t>
+              <a:t>Agents parse data,</a:t>
             </a:r>
             <a:endParaRPr lang="en-US" sz="1200" dirty="0"/>
           </a:p>
@@ -2000,7 +2096,7 @@
               <a:buNone/>
             </a:pPr>
             <a:r>
-              <a:rPr lang="en-US" sz="1200">
+              <a:rPr lang="en-US" sz="1200" dirty="0">
                 <a:solidFill>
                   <a:srgbClr val="64748B"/>
                 </a:solidFill>
@@ -2017,7 +2113,7 @@
               <a:buNone/>
             </a:pPr>
             <a:r>
-              <a:rPr lang="en-US" sz="1200">
+              <a:rPr lang="en-US" sz="1200" dirty="0">
                 <a:solidFill>
                   <a:srgbClr val="64748B"/>
                 </a:solidFill>
@@ -3457,6 +3553,42 @@
           <a:lstStyle/>
           <a:p>
             <a:endParaRPr lang="pt-PT"/>
+          </a:p>
+        </p:txBody>
+      </p:sp>
+      <p:sp>
+        <p:nvSpPr>
+          <p:cNvPr id="7" name="TextBox 6">
+            <a:extLst>
+              <a:ext uri="{FF2B5EF4-FFF2-40B4-BE49-F238E27FC236}">
+                <a16:creationId xmlns:a16="http://schemas.microsoft.com/office/drawing/2014/main" id="{1F5D939C-E044-8F06-2DF8-F3B39EF1DF1C}"/>
+              </a:ext>
+            </a:extLst>
+          </p:cNvPr>
+          <p:cNvSpPr txBox="1"/>
+          <p:nvPr/>
+        </p:nvSpPr>
+        <p:spPr>
+          <a:xfrm>
+            <a:off x="548640" y="1807698"/>
+            <a:ext cx="8180363" cy="923330"/>
+          </a:xfrm>
+          <a:prstGeom prst="rect">
+            <a:avLst/>
+          </a:prstGeom>
+          <a:noFill/>
+        </p:spPr>
+        <p:txBody>
+          <a:bodyPr wrap="square" rtlCol="0">
+            <a:spAutoFit/>
+          </a:bodyPr>
+          <a:lstStyle/>
+          <a:p>
+            <a:r>
+              <a:rPr lang="en-US"/>
+              <a:t>With more time, we would refine the process to dynamically source candidates from public professional data sources based on the job requirements extracted by the first agent, instead of relying on a mock CV dataset.</a:t>
+            </a:r>
+            <a:endParaRPr lang="pt-PT" dirty="0"/>
           </a:p>
         </p:txBody>
       </p:sp>

--- a/docs/PITCH_DEMO.pptx
+++ b/docs/PITCH_DEMO.pptx
@@ -128,7 +128,7 @@
   <pc:docChgLst>
     <pc:chgData name="Barbosa Diniz, Sofia" userId="7df14296-6125-49ec-a4f5-4260895b8cd0" providerId="ADAL" clId="{AB103130-9596-4E2D-B338-D09A3A47D381}"/>
     <pc:docChg chg="undo redo custSel modSld">
-      <pc:chgData name="Barbosa Diniz, Sofia" userId="7df14296-6125-49ec-a4f5-4260895b8cd0" providerId="ADAL" clId="{AB103130-9596-4E2D-B338-D09A3A47D381}" dt="2026-05-15T14:02:48.463" v="355"/>
+      <pc:chgData name="Barbosa Diniz, Sofia" userId="7df14296-6125-49ec-a4f5-4260895b8cd0" providerId="ADAL" clId="{AB103130-9596-4E2D-B338-D09A3A47D381}" dt="2026-05-15T14:07:26.871" v="366" actId="20577"/>
       <pc:docMkLst>
         <pc:docMk/>
       </pc:docMkLst>
@@ -171,13 +171,13 @@
         </pc:spChg>
       </pc:sldChg>
       <pc:sldChg chg="addSp delSp modSp mod">
-        <pc:chgData name="Barbosa Diniz, Sofia" userId="7df14296-6125-49ec-a4f5-4260895b8cd0" providerId="ADAL" clId="{AB103130-9596-4E2D-B338-D09A3A47D381}" dt="2026-05-15T14:02:48.463" v="355"/>
+        <pc:chgData name="Barbosa Diniz, Sofia" userId="7df14296-6125-49ec-a4f5-4260895b8cd0" providerId="ADAL" clId="{AB103130-9596-4E2D-B338-D09A3A47D381}" dt="2026-05-15T14:07:26.871" v="366" actId="20577"/>
         <pc:sldMkLst>
           <pc:docMk/>
           <pc:sldMk cId="0" sldId="259"/>
         </pc:sldMkLst>
         <pc:spChg chg="add mod">
-          <ac:chgData name="Barbosa Diniz, Sofia" userId="7df14296-6125-49ec-a4f5-4260895b8cd0" providerId="ADAL" clId="{AB103130-9596-4E2D-B338-D09A3A47D381}" dt="2026-05-15T14:02:48.463" v="355"/>
+          <ac:chgData name="Barbosa Diniz, Sofia" userId="7df14296-6125-49ec-a4f5-4260895b8cd0" providerId="ADAL" clId="{AB103130-9596-4E2D-B338-D09A3A47D381}" dt="2026-05-15T14:07:26.871" v="366" actId="20577"/>
           <ac:spMkLst>
             <pc:docMk/>
             <pc:sldMk cId="0" sldId="259"/>
@@ -3585,8 +3585,16 @@
           <a:lstStyle/>
           <a:p>
             <a:r>
+              <a:rPr lang="en-US" dirty="0"/>
+              <a:t>With more time, we would refine the process to dynamically source candidates </a:t>
+            </a:r>
+            <a:r>
               <a:rPr lang="en-US"/>
-              <a:t>With more time, we would refine the process to dynamically source candidates from public professional data sources based on the job requirements extracted by the first agent, instead of relying on a mock CV dataset.</a:t>
+              <a:t>from LinkedIn data </a:t>
+            </a:r>
+            <a:r>
+              <a:rPr lang="en-US" dirty="0"/>
+              <a:t>sources based on the job requirements extracted by the first agent, instead of relying on a mock CV dataset.</a:t>
             </a:r>
             <a:endParaRPr lang="pt-PT" dirty="0"/>
           </a:p>
